--- a/assets/pptx/catalog-558.pptx
+++ b/assets/pptx/catalog-558.pptx
@@ -3272,7 +3272,7 @@
                 <a:ea typeface="Ebrima"/>
                 <a:cs typeface="Ebrima"/>
               </a:rPr>
-              <a:t>የተረጋገጠ ነው ፍጻሜው እንደሚያምር (2x)</a:t>
+              <a:t>የተረጋገጠ ነው ፍጻሜው እንደሚያምር 2x</a:t>
             </a:r>
           </a:p>
         </p:txBody>
@@ -3357,7 +3357,7 @@
                 <a:ea typeface="Ebrima"/>
                 <a:cs typeface="Ebrima"/>
               </a:rPr>
-              <a:t>እግዚአብሔር አይደለም ዎይ (2x)</a:t>
+              <a:t>እግዚአብሔር አይደለም ዎይ 2x</a:t>
             </a:r>
           </a:p>
           <a:p>
@@ -3393,7 +3393,7 @@
                 <a:ea typeface="Ebrima"/>
                 <a:cs typeface="Ebrima"/>
               </a:rPr>
-              <a:t>እግዚአብሔር አይደለም ዎይ (2x)</a:t>
+              <a:t>እግዚአብሔር አይደለም ዎይ 2x</a:t>
             </a:r>
           </a:p>
         </p:txBody>
@@ -3568,7 +3568,7 @@
                 <a:ea typeface="Ebrima"/>
                 <a:cs typeface="Ebrima"/>
               </a:rPr>
-              <a:t>በእርሱ ይመካ (2x)</a:t>
+              <a:t>በእርሱ ይመካ 2x</a:t>
             </a:r>
           </a:p>
         </p:txBody>
@@ -3653,7 +3653,7 @@
                 <a:ea typeface="Ebrima"/>
                 <a:cs typeface="Ebrima"/>
               </a:rPr>
-              <a:t>ንጹህ ፍፁም ነውር የሌለህ (2x)</a:t>
+              <a:t>ንጹህ ፍፁም ነውር የሌለህ 2x</a:t>
             </a:r>
           </a:p>
         </p:txBody>
@@ -3774,7 +3774,7 @@
                 <a:ea typeface="Ebrima"/>
                 <a:cs typeface="Ebrima"/>
               </a:rPr>
-              <a:t>አንተ እንከን የለህም (2x)</a:t>
+              <a:t>አንተ እንከን የለህም 2x</a:t>
             </a:r>
           </a:p>
         </p:txBody>
@@ -3877,7 +3877,7 @@
                 <a:ea typeface="Ebrima"/>
                 <a:cs typeface="Ebrima"/>
               </a:rPr>
-              <a:t>ኦ የለብህ (2x)</a:t>
+              <a:t>ኦ የለብህ 2x</a:t>
             </a:r>
           </a:p>
         </p:txBody>
@@ -3962,7 +3962,7 @@
                 <a:ea typeface="Ebrima"/>
                 <a:cs typeface="Ebrima"/>
               </a:rPr>
-              <a:t>ንጹህ ፍፁም ነውር የሌለህ (2x)</a:t>
+              <a:t>ንጹህ ፍፁም ነውር የሌለህ 2x</a:t>
             </a:r>
           </a:p>
         </p:txBody>
@@ -4083,7 +4083,7 @@
                 <a:ea typeface="Ebrima"/>
                 <a:cs typeface="Ebrima"/>
               </a:rPr>
-              <a:t>አንተ እንከን የለህም (2x)</a:t>
+              <a:t>አንተ እንከን የለህም 2x</a:t>
             </a:r>
           </a:p>
         </p:txBody>
@@ -4186,7 +4186,7 @@
                 <a:ea typeface="Ebrima"/>
                 <a:cs typeface="Ebrima"/>
               </a:rPr>
-              <a:t>ኦ የለብህ (2x)</a:t>
+              <a:t>ኦ የለብህ 2x</a:t>
             </a:r>
           </a:p>
         </p:txBody>
@@ -4271,7 +4271,7 @@
                 <a:ea typeface="Ebrima"/>
                 <a:cs typeface="Ebrima"/>
               </a:rPr>
-              <a:t>ንጹህ ፍፁም ነውር የሌለህ (2x)</a:t>
+              <a:t>ንጹህ ፍፁም ነውር የሌለህ 2x</a:t>
             </a:r>
           </a:p>
         </p:txBody>
@@ -4392,7 +4392,7 @@
                 <a:ea typeface="Ebrima"/>
                 <a:cs typeface="Ebrima"/>
               </a:rPr>
-              <a:t>አንተ እንከን የለህም (2x)</a:t>
+              <a:t>አንተ እንከን የለህም 2x</a:t>
             </a:r>
           </a:p>
         </p:txBody>
@@ -4477,7 +4477,7 @@
                 <a:ea typeface="Ebrima"/>
                 <a:cs typeface="Ebrima"/>
               </a:rPr>
-              <a:t>እግዚአብሔር አይደለም ዎይ (2x)</a:t>
+              <a:t>እግዚአብሔር አይደለም ዎይ 2x</a:t>
             </a:r>
           </a:p>
           <a:p>
@@ -4513,7 +4513,7 @@
                 <a:ea typeface="Ebrima"/>
                 <a:cs typeface="Ebrima"/>
               </a:rPr>
-              <a:t>እግዚአብሔር አይደለም ዎይ (2x)</a:t>
+              <a:t>እግዚአብሔር አይደለም ዎይ 2x</a:t>
             </a:r>
           </a:p>
         </p:txBody>
@@ -4652,7 +4652,7 @@
                 <a:ea typeface="Ebrima"/>
                 <a:cs typeface="Ebrima"/>
               </a:rPr>
-              <a:t>በዚያ ይመካ (2x)</a:t>
+              <a:t>በዚያ ይመካ 2x</a:t>
             </a:r>
           </a:p>
         </p:txBody>
@@ -4755,7 +4755,7 @@
                 <a:ea typeface="Ebrima"/>
                 <a:cs typeface="Ebrima"/>
               </a:rPr>
-              <a:t>ያላንተ ተስፋ እንደሌለኝ (2x)</a:t>
+              <a:t>ያላንተ ተስፋ እንደሌለኝ 2x</a:t>
             </a:r>
           </a:p>
         </p:txBody>
